--- a/prezentace/Prezentace_Svobods_mikeska.pptx
+++ b/prezentace/Prezentace_Svobods_mikeska.pptx
@@ -4718,31 +4718,39 @@
           </a:p>
         </p:txBody>
       </p:sp>
-      <p:sp>
-        <p:nvSpPr>
-          <p:cNvPr id="9" name="Content Placeholder 8">
+      <p:pic>
+        <p:nvPicPr>
+          <p:cNvPr id="11" name="Content Placeholder 10">
             <a:extLst>
               <a:ext uri="{FF2B5EF4-FFF2-40B4-BE49-F238E27FC236}">
-                <a16:creationId xmlns:a16="http://schemas.microsoft.com/office/drawing/2014/main" id="{C0E49A0C-09ED-EB72-AFF1-FB00E645C9B9}"/>
+                <a16:creationId xmlns:a16="http://schemas.microsoft.com/office/drawing/2014/main" id="{25658E41-F803-1E21-9E9C-5069334FE97D}"/>
               </a:ext>
             </a:extLst>
           </p:cNvPr>
-          <p:cNvSpPr>
-            <a:spLocks noGrp="1"/>
-          </p:cNvSpPr>
+          <p:cNvPicPr>
+            <a:picLocks noGrp="1" noChangeAspect="1"/>
+          </p:cNvPicPr>
           <p:nvPr>
             <p:ph sz="half" idx="1"/>
           </p:nvPr>
-        </p:nvSpPr>
-        <p:spPr/>
-        <p:txBody>
-          <a:bodyPr/>
-          <a:lstStyle/>
-          <a:p>
-            <a:endParaRPr lang="cs-CZ"/>
-          </a:p>
-        </p:txBody>
-      </p:sp>
+        </p:nvPicPr>
+        <p:blipFill>
+          <a:blip r:embed="rId2"/>
+          <a:srcRect l="2711" t="6304" r="2132" b="10140"/>
+          <a:stretch>
+            <a:fillRect/>
+          </a:stretch>
+        </p:blipFill>
+        <p:spPr>
+          <a:xfrm>
+            <a:off x="363606" y="1112280"/>
+            <a:ext cx="6266898" cy="3703742"/>
+          </a:xfrm>
+          <a:prstGeom prst="rect">
+            <a:avLst/>
+          </a:prstGeom>
+        </p:spPr>
+      </p:pic>
     </p:spTree>
     <p:extLst>
       <p:ext uri="{BB962C8B-B14F-4D97-AF65-F5344CB8AC3E}">
